--- a/output/week6/Week6_Presentation_BICT3202_OOAD.pptx
+++ b/output/week6/Week6_Presentation_BICT3202_OOAD.pptx
@@ -4583,7 +4583,7 @@
                 </a:solidFill>
                 <a:latin typeface="Open Sans"/>
               </a:rPr>
-              <a:t>Animal → Dog, Cat, Bird</a:t>
+              <a:t>Animal -&gt; Dog, Cat, Bird</a:t>
             </a:r>
           </a:p>
         </p:txBody>
@@ -5610,7 +5610,7 @@
                 </a:solidFill>
                 <a:latin typeface="Open Sans"/>
               </a:rPr>
-              <a:t>makeSound() → bark / meow / moo — the object decides how to respond.</a:t>
+              <a:t>makeSound() -&gt; bark / meow / moo — the object decides how to respond.</a:t>
             </a:r>
           </a:p>
         </p:txBody>
@@ -6900,7 +6900,7 @@
                 </a:solidFill>
                 <a:latin typeface="Open Sans"/>
               </a:rPr>
-              <a:t>Animal a = new Dog();  a.makeSound();  →  Bark</a:t>
+              <a:t>Animal a = new Dog();  a.makeSound();  -&gt;  Bark</a:t>
             </a:r>
           </a:p>
           <a:p>
@@ -6937,7 +6937,7 @@
                 </a:solidFill>
                 <a:latin typeface="Open Sans"/>
               </a:rPr>
-              <a:t>a = new Cat();  a.makeSound();  →  Meow</a:t>
+              <a:t>a = new Cat();  a.makeSound();  -&gt;  Meow</a:t>
             </a:r>
           </a:p>
           <a:p>
@@ -7936,7 +7936,7 @@
                 </a:solidFill>
                 <a:latin typeface="Open Sans"/>
               </a:rPr>
-              <a:t>Composition (Order ◆ OrderItem) + inheritance (Payment) + polymorphism + grouping.</a:t>
+              <a:t>Composition (Order *-- OrderItem) + inheritance (Payment) + polymorphism + grouping.</a:t>
             </a:r>
           </a:p>
         </p:txBody>
@@ -9026,7 +9026,7 @@
                 </a:solidFill>
                 <a:latin typeface="Open Sans"/>
               </a:rPr>
-              <a:t>User ▷ Student · User ▷ Lecturer.</a:t>
+              <a:t>User --|&gt; Student · User --|&gt; Lecturer.</a:t>
             </a:r>
           </a:p>
           <a:p>
@@ -9137,7 +9137,7 @@
                 </a:solidFill>
                 <a:latin typeface="Open Sans"/>
               </a:rPr>
-              <a:t>Course ◆-- CourseMaterial (strongly owned parts).</a:t>
+              <a:t>Course *-- CourseMaterial (strongly owned parts).</a:t>
             </a:r>
           </a:p>
           <a:p>
@@ -9174,7 +9174,7 @@
                 </a:solidFill>
                 <a:latin typeface="Open Sans"/>
               </a:rPr>
-              <a:t>Assessment.calculateMark() → Assignment, Exam, Quiz, Project.</a:t>
+              <a:t>Assessment.calculateMark() -&gt; Assignment, Exam, Quiz, Project.</a:t>
             </a:r>
           </a:p>
         </p:txBody>
@@ -10629,7 +10629,7 @@
                 </a:solidFill>
                 <a:latin typeface="Open Sans"/>
               </a:rPr>
-              <a:t>Draw Department &lt;&gt;-- Lecturer and Order ◆-- OrderLine — justify each choice.</a:t>
+              <a:t>Draw Department &lt;&gt;-- Lecturer and Order *-- OrderLine — justify each choice.</a:t>
             </a:r>
           </a:p>
           <a:p>
